--- a/Schools_ML_Track/camp_2026/slides/DA/DA02.pptx
+++ b/Schools_ML_Track/camp_2026/slides/DA/DA02.pptx
@@ -128,7 +128,7 @@
   <p:extLst>
     <p:ext uri="{521415D9-36F7-43E2-AB2F-B90AF26B5E84}">
       <p14:sectionLst xmlns:p14="http://schemas.microsoft.com/office/powerpoint/2010/main">
-        <p14:section name="Opening" id="{c608dfa9-05cb-0f6d-c97d-90e351ffd6d0}">
+        <p14:section name="Opening" id="{5f21fffe-6fed-640c-7d19-aa848ccec7d7}">
           <p14:sldIdLst>
             <p14:sldId id="256"/>
             <p14:sldId id="257"/>
@@ -139,7 +139,7 @@
             <p14:sldId id="262"/>
           </p14:sldIdLst>
         </p14:section>
-        <p14:section name="Block A" id="{f4991eac-8116-5a36-d116-236938489ab5}">
+        <p14:section name="Block A" id="{f33fd55a-5c0f-e55d-05d7-74b6feeb6718}">
           <p14:sldIdLst>
             <p14:sldId id="263"/>
             <p14:sldId id="264"/>
@@ -149,15 +149,15 @@
             <p14:sldId id="269"/>
           </p14:sldIdLst>
         </p14:section>
-        <p14:section name="Break" id="{c1405ab0-56cb-aa41-f89c-bff102d6228d}">
+        <p14:section name="Break" id="{e235fded-897b-d21d-93fe-6c48dec85f29}">
           <p14:sldIdLst>
             <p14:sldId id="267"/>
           </p14:sldIdLst>
         </p14:section>
-        <p14:section name="Block A" id="{b1e7997f-4499-2f7f-22c3-b50e4cbb8d6c}">
+        <p14:section name="Block A" id="{9de894c5-ee5e-0f80-fff2-6333d2e266c6}">
           <p14:sldIdLst/>
         </p14:section>
-        <p14:section name="Block B" id="{166d4a9a-c74c-7872-c25c-3132cc32dfec}">
+        <p14:section name="Block B" id="{0091b53d-a26e-01c0-14fc-fdb590859211}">
           <p14:sldIdLst>
             <p14:sldId id="270"/>
             <p14:sldId id="271"/>
@@ -166,7 +166,7 @@
             <p14:sldId id="274"/>
           </p14:sldIdLst>
         </p14:section>
-        <p14:section name="Make and close" id="{8d088910-cc1b-700b-bcc4-e1d0537d26d9}">
+        <p14:section name="Make and close" id="{817d2baf-8182-cc38-a8d9-35296939de6a}">
           <p14:sldIdLst>
             <p14:sldId id="275"/>
             <p14:sldId id="276"/>

--- a/Schools_ML_Track/camp_2026/slides/DA/DA02.pptx
+++ b/Schools_ML_Track/camp_2026/slides/DA/DA02.pptx
@@ -128,7 +128,7 @@
   <p:extLst>
     <p:ext uri="{521415D9-36F7-43E2-AB2F-B90AF26B5E84}">
       <p14:sectionLst xmlns:p14="http://schemas.microsoft.com/office/powerpoint/2010/main">
-        <p14:section name="Opening" id="{5f21fffe-6fed-640c-7d19-aa848ccec7d7}">
+        <p14:section name="Opening" id="{94c1ba44-4475-8d4e-9dad-64a2cde03a16}">
           <p14:sldIdLst>
             <p14:sldId id="256"/>
             <p14:sldId id="257"/>
@@ -139,7 +139,7 @@
             <p14:sldId id="262"/>
           </p14:sldIdLst>
         </p14:section>
-        <p14:section name="Block A" id="{f33fd55a-5c0f-e55d-05d7-74b6feeb6718}">
+        <p14:section name="Block A" id="{d7965e74-4ac3-a509-7b77-97321d440ad1}">
           <p14:sldIdLst>
             <p14:sldId id="263"/>
             <p14:sldId id="264"/>
@@ -149,15 +149,15 @@
             <p14:sldId id="269"/>
           </p14:sldIdLst>
         </p14:section>
-        <p14:section name="Break" id="{e235fded-897b-d21d-93fe-6c48dec85f29}">
+        <p14:section name="Break" id="{2c103511-edc5-61fa-5b33-bf24096d6071}">
           <p14:sldIdLst>
             <p14:sldId id="267"/>
           </p14:sldIdLst>
         </p14:section>
-        <p14:section name="Block A" id="{9de894c5-ee5e-0f80-fff2-6333d2e266c6}">
+        <p14:section name="Block A" id="{95e4d8d1-2052-8ced-dac4-17b30d99ad4b}">
           <p14:sldIdLst/>
         </p14:section>
-        <p14:section name="Block B" id="{0091b53d-a26e-01c0-14fc-fdb590859211}">
+        <p14:section name="Block B" id="{ae862bf1-059b-6a83-1754-a4a27bc70350}">
           <p14:sldIdLst>
             <p14:sldId id="270"/>
             <p14:sldId id="271"/>
@@ -166,7 +166,7 @@
             <p14:sldId id="274"/>
           </p14:sldIdLst>
         </p14:section>
-        <p14:section name="Make and close" id="{817d2baf-8182-cc38-a8d9-35296939de6a}">
+        <p14:section name="Make and close" id="{a85aaf91-b796-9c14-3ce7-d3529fda5481}">
           <p14:sldIdLst>
             <p14:sldId id="275"/>
             <p14:sldId id="276"/>
@@ -1386,8 +1386,8 @@
           <a:p>
             <a:r>
               <a:rPr lang="en-US" dirty="0"/>
-              <a:t>Make one small change. Convert the text "1500" to an integer with int() and multiply it by 4. Run it, then tell someone what you saw.
-What you should find: 6000.</a:t>
+              <a:t>Make one small change. Convert the text "2500.5" to a number with float() and multiply it by 4. Run it, then tell someone what you saw.
+What you should find: 10002.0.</a:t>
             </a:r>
             <a:endParaRPr lang="en-US" dirty="0"/>
           </a:p>
@@ -5437,197 +5437,40 @@
           </a:p>
         </p:txBody>
       </p:sp>
-      <p:sp>
-        <p:nvSpPr>
-          <p:cNvPr id="3" name="Shape 1"/>
-          <p:cNvSpPr/>
+      <p:pic>
+        <p:nvPicPr>
+          <p:cNvPr id="3" name="Image 0" descr="Look closely">    </p:cNvPr>
+          <p:cNvPicPr>
+            <a:picLocks noChangeAspect="1"/>
+          </p:cNvPicPr>
           <p:nvPr/>
-        </p:nvSpPr>
-        <p:spPr>
-          <a:xfrm>
-            <a:off x="7498080" y="1737360"/>
-            <a:ext cx="4023360" cy="1924812"/>
-          </a:xfrm>
-          <a:prstGeom prst="roundRect">
-            <a:avLst>
-              <a:gd name="adj" fmla="val 3800"/>
-            </a:avLst>
-          </a:prstGeom>
-          <a:solidFill>
-            <a:srgbClr val="111111"/>
-          </a:solidFill>
-          <a:ln/>
-        </p:spPr>
-      </p:sp>
-      <p:sp>
-        <p:nvSpPr>
-          <p:cNvPr id="4" name="Text 2"/>
+        </p:nvPicPr>
+        <p:blipFill>
+          <a:blip r:embed="rId1"/>
+          <a:stretch>
+            <a:fillRect/>
+          </a:stretch>
+        </p:blipFill>
+        <p:spPr>
+          <a:xfrm>
+            <a:off x="9875520" y="4480560"/>
+            <a:ext cx="1645920" cy="1645920"/>
+          </a:xfrm>
+          <a:prstGeom prst="rect">
+            <a:avLst/>
+          </a:prstGeom>
+        </p:spPr>
+      </p:pic>
+      <p:sp>
+        <p:nvSpPr>
+          <p:cNvPr id="4" name="Text 1"/>
           <p:cNvSpPr txBox="1"/>
           <p:nvPr/>
         </p:nvSpPr>
         <p:spPr>
           <a:xfrm>
-            <a:off x="7699248" y="1938528"/>
-            <a:ext cx="3621024" cy="1522476"/>
-          </a:xfrm>
-          <a:prstGeom prst="rect">
-            <a:avLst/>
-          </a:prstGeom>
-          <a:noFill/>
-          <a:ln/>
-        </p:spPr>
-        <p:txBody>
-          <a:bodyPr wrap="square" lIns="0" tIns="0" rIns="0" bIns="0" rtlCol="0" anchor="t"/>
-          <a:lstStyle/>
-          <a:p>
-            <a:pPr algn="l" indent="0" marL="0">
-              <a:lnSpc>
-                <a:spcPts val="1950"/>
-              </a:lnSpc>
-              <a:buNone/>
-            </a:pPr>
-            <a:r>
-              <a:rPr lang="en-US" sz="1500" dirty="0">
-                <a:solidFill>
-                  <a:srgbClr val="FFFFFF"/>
-                </a:solidFill>
-                <a:latin typeface="Courier New" pitchFamily="34" charset="0"/>
-                <a:ea typeface="Courier New" pitchFamily="34" charset="-122"/>
-                <a:cs typeface="Courier New" pitchFamily="34" charset="-120"/>
-              </a:rPr>
-              <a:t>price = 2500.5</a:t>
-            </a:r>
-            <a:endParaRPr lang="en-US" sz="1500" dirty="0"/>
-          </a:p>
-          <a:p>
-            <a:pPr algn="l" indent="0" marL="0">
-              <a:lnSpc>
-                <a:spcPts val="1950"/>
-              </a:lnSpc>
-              <a:buNone/>
-            </a:pPr>
-            <a:r>
-              <a:rPr lang="en-US" sz="1500" dirty="0">
-                <a:solidFill>
-                  <a:srgbClr val="FFFFFF"/>
-                </a:solidFill>
-                <a:latin typeface="Courier New" pitchFamily="34" charset="0"/>
-                <a:ea typeface="Courier New" pitchFamily="34" charset="-122"/>
-                <a:cs typeface="Courier New" pitchFamily="34" charset="-120"/>
-              </a:rPr>
-              <a:t>text_price = </a:t>
-            </a:r>
-            <a:pPr algn="l" indent="0" marL="0">
-              <a:lnSpc>
-                <a:spcPts val="1950"/>
-              </a:lnSpc>
-              <a:buNone/>
-            </a:pPr>
-            <a:r>
-              <a:rPr lang="en-US" sz="1500" dirty="0">
-                <a:solidFill>
-                  <a:srgbClr val="E0BE36"/>
-                </a:solidFill>
-                <a:latin typeface="Courier New" pitchFamily="34" charset="0"/>
-                <a:ea typeface="Courier New" pitchFamily="34" charset="-122"/>
-                <a:cs typeface="Courier New" pitchFamily="34" charset="-120"/>
-              </a:rPr>
-              <a:t>"2500.5"</a:t>
-            </a:r>
-            <a:endParaRPr lang="en-US" sz="1500" dirty="0"/>
-          </a:p>
-          <a:p>
-            <a:pPr algn="l" indent="0" marL="0">
-              <a:lnSpc>
-                <a:spcPts val="1950"/>
-              </a:lnSpc>
-              <a:buNone/>
-            </a:pPr>
-            <a:r>
-              <a:rPr lang="en-US" sz="1500" dirty="0">
-                <a:solidFill>
-                  <a:srgbClr val="FFFFFF"/>
-                </a:solidFill>
-                <a:latin typeface="Courier New" pitchFamily="34" charset="0"/>
-                <a:ea typeface="Courier New" pitchFamily="34" charset="-122"/>
-                <a:cs typeface="Courier New" pitchFamily="34" charset="-120"/>
-              </a:rPr>
-              <a:t>print(type(price))</a:t>
-            </a:r>
-            <a:endParaRPr lang="en-US" sz="1500" dirty="0"/>
-          </a:p>
-          <a:p>
-            <a:pPr algn="l" indent="0" marL="0">
-              <a:lnSpc>
-                <a:spcPts val="1950"/>
-              </a:lnSpc>
-              <a:buNone/>
-            </a:pPr>
-            <a:r>
-              <a:rPr lang="en-US" sz="1500" dirty="0">
-                <a:solidFill>
-                  <a:srgbClr val="FFFFFF"/>
-                </a:solidFill>
-                <a:latin typeface="Courier New" pitchFamily="34" charset="0"/>
-                <a:ea typeface="Courier New" pitchFamily="34" charset="-122"/>
-                <a:cs typeface="Courier New" pitchFamily="34" charset="-120"/>
-              </a:rPr>
-              <a:t>print(type(text_price))</a:t>
-            </a:r>
-            <a:endParaRPr lang="en-US" sz="1500" dirty="0"/>
-          </a:p>
-          <a:p>
-            <a:pPr algn="l" indent="0" marL="0">
-              <a:lnSpc>
-                <a:spcPts val="1950"/>
-              </a:lnSpc>
-              <a:buNone/>
-            </a:pPr>
-            <a:r>
-              <a:rPr lang="en-US" sz="1500" dirty="0">
-                <a:solidFill>
-                  <a:srgbClr val="FFFFFF"/>
-                </a:solidFill>
-                <a:latin typeface="Courier New" pitchFamily="34" charset="0"/>
-                <a:ea typeface="Courier New" pitchFamily="34" charset="-122"/>
-                <a:cs typeface="Courier New" pitchFamily="34" charset="-120"/>
-              </a:rPr>
-              <a:t>print(price * 2)</a:t>
-            </a:r>
-            <a:endParaRPr lang="en-US" sz="1500" dirty="0"/>
-          </a:p>
-          <a:p>
-            <a:pPr algn="l" indent="0" marL="0">
-              <a:lnSpc>
-                <a:spcPts val="1950"/>
-              </a:lnSpc>
-              <a:buNone/>
-            </a:pPr>
-            <a:r>
-              <a:rPr lang="en-US" sz="1500" dirty="0">
-                <a:solidFill>
-                  <a:srgbClr val="FFFFFF"/>
-                </a:solidFill>
-                <a:latin typeface="Courier New" pitchFamily="34" charset="0"/>
-                <a:ea typeface="Courier New" pitchFamily="34" charset="-122"/>
-                <a:cs typeface="Courier New" pitchFamily="34" charset="-120"/>
-              </a:rPr>
-              <a:t>print(float(text_price) * 2)</a:t>
-            </a:r>
-            <a:endParaRPr lang="en-US" sz="1500" dirty="0"/>
-          </a:p>
-        </p:txBody>
-      </p:sp>
-      <p:sp>
-        <p:nvSpPr>
-          <p:cNvPr id="5" name="Text 3"/>
-          <p:cNvSpPr txBox="1"/>
-          <p:nvPr/>
-        </p:nvSpPr>
-        <p:spPr>
-          <a:xfrm>
             <a:off x="640080" y="1737360"/>
-            <a:ext cx="6400800" cy="4389120"/>
+            <a:ext cx="8961120" cy="4389120"/>
           </a:xfrm>
           <a:prstGeom prst="rect">
             <a:avLst/>
@@ -5839,7 +5682,7 @@
                 <a:ea typeface="Lato" pitchFamily="34" charset="-122"/>
                 <a:cs typeface="Lato" pitchFamily="34" charset="-120"/>
               </a:rPr>
-              <a:t>Convert the text "1500" to an integer with int() and multiply it by 4.</a:t>
+              <a:t>Convert the text "2500.5" to a number with float() and multiply it by 4.</a:t>
             </a:r>
             <a:endParaRPr lang="en-US" sz="3600" dirty="0"/>
           </a:p>
@@ -6553,15 +6396,15 @@
           <a:p>
             <a:pPr algn="l" indent="0" marL="0">
               <a:lnSpc>
-                <a:spcPts val="3600"/>
+                <a:spcPts val="3360"/>
               </a:lnSpc>
               <a:spcAft>
-                <a:spcPts val="2520"/>
+                <a:spcPts val="2020"/>
               </a:spcAft>
               <a:buNone/>
             </a:pPr>
             <a:r>
-              <a:rPr lang="en-US" sz="3000" dirty="0">
+              <a:rPr lang="en-US" sz="2800" dirty="0">
                 <a:solidFill>
                   <a:srgbClr val="111111"/>
                 </a:solidFill>
@@ -6569,22 +6412,22 @@
                 <a:ea typeface="Lato" pitchFamily="34" charset="-122"/>
                 <a:cs typeface="Lato" pitchFamily="34" charset="-120"/>
               </a:rPr>
-              <a:t>Create a decimal price of 2500.5 and a quantity of 2. Print the total. Write one sentence on why "2500.5" with quotation marks behaves differently.</a:t>
-            </a:r>
-            <a:endParaRPr lang="en-US" sz="3000" dirty="0"/>
-          </a:p>
-          <a:p>
-            <a:pPr algn="l" indent="0" marL="0">
-              <a:lnSpc>
-                <a:spcPts val="3600"/>
+              <a:t>Create a decimal price of 2500.5 and a quantity of 2.</a:t>
+            </a:r>
+            <a:endParaRPr lang="en-US" sz="2800" dirty="0"/>
+          </a:p>
+          <a:p>
+            <a:pPr algn="l" indent="0" marL="0">
+              <a:lnSpc>
+                <a:spcPts val="3360"/>
               </a:lnSpc>
               <a:spcAft>
-                <a:spcPts val="2520"/>
+                <a:spcPts val="2020"/>
               </a:spcAft>
               <a:buNone/>
             </a:pPr>
             <a:r>
-              <a:rPr lang="en-US" sz="3000" dirty="0">
+              <a:rPr lang="en-US" sz="2800" dirty="0">
                 <a:solidFill>
                   <a:srgbClr val="111111"/>
                 </a:solidFill>
@@ -6592,9 +6435,55 @@
                 <a:ea typeface="Lato" pitchFamily="34" charset="-122"/>
                 <a:cs typeface="Lato" pitchFamily="34" charset="-120"/>
               </a:rPr>
+              <a:t>Print the total.</a:t>
+            </a:r>
+            <a:endParaRPr lang="en-US" sz="2800" dirty="0"/>
+          </a:p>
+          <a:p>
+            <a:pPr algn="l" indent="0" marL="0">
+              <a:lnSpc>
+                <a:spcPts val="3360"/>
+              </a:lnSpc>
+              <a:spcAft>
+                <a:spcPts val="2020"/>
+              </a:spcAft>
+              <a:buNone/>
+            </a:pPr>
+            <a:r>
+              <a:rPr lang="en-US" sz="2800" dirty="0">
+                <a:solidFill>
+                  <a:srgbClr val="111111"/>
+                </a:solidFill>
+                <a:latin typeface="Lato" pitchFamily="34" charset="0"/>
+                <a:ea typeface="Lato" pitchFamily="34" charset="-122"/>
+                <a:cs typeface="Lato" pitchFamily="34" charset="-120"/>
+              </a:rPr>
+              <a:t>Write one sentence on why "2500.5" with quotation marks behaves differently.</a:t>
+            </a:r>
+            <a:endParaRPr lang="en-US" sz="2800" dirty="0"/>
+          </a:p>
+          <a:p>
+            <a:pPr algn="l" indent="0" marL="0">
+              <a:lnSpc>
+                <a:spcPts val="3360"/>
+              </a:lnSpc>
+              <a:spcAft>
+                <a:spcPts val="2020"/>
+              </a:spcAft>
+              <a:buNone/>
+            </a:pPr>
+            <a:r>
+              <a:rPr lang="en-US" sz="2800" dirty="0">
+                <a:solidFill>
+                  <a:srgbClr val="111111"/>
+                </a:solidFill>
+                <a:latin typeface="Lato" pitchFamily="34" charset="0"/>
+                <a:ea typeface="Lato" pitchFamily="34" charset="-122"/>
+                <a:cs typeface="Lato" pitchFamily="34" charset="-120"/>
+              </a:rPr>
               <a:t>Save it as DA02. Write two sentences: what you changed and how you checked it.</a:t>
             </a:r>
-            <a:endParaRPr lang="en-US" sz="3000" dirty="0"/>
+            <a:endParaRPr lang="en-US" sz="2800" dirty="0"/>
           </a:p>
         </p:txBody>
       </p:sp>
@@ -7773,9 +7662,33 @@
           </a:ln>
         </p:spPr>
       </p:sp>
-      <p:sp>
-        <p:nvSpPr>
-          <p:cNvPr id="8" name="Text 5"/>
+      <p:pic>
+        <p:nvPicPr>
+          <p:cNvPr id="8" name="Image 1" descr="integer">    </p:cNvPr>
+          <p:cNvPicPr>
+            <a:picLocks noChangeAspect="1"/>
+          </p:cNvPicPr>
+          <p:nvPr/>
+        </p:nvPicPr>
+        <p:blipFill>
+          <a:blip r:embed="rId2"/>
+          <a:stretch>
+            <a:fillRect/>
+          </a:stretch>
+        </p:blipFill>
+        <p:spPr>
+          <a:xfrm>
+            <a:off x="640080" y="3264408"/>
+            <a:ext cx="1188720" cy="1188720"/>
+          </a:xfrm>
+          <a:prstGeom prst="rect">
+            <a:avLst/>
+          </a:prstGeom>
+        </p:spPr>
+      </p:pic>
+      <p:sp>
+        <p:nvSpPr>
+          <p:cNvPr id="9" name="Text 5"/>
           <p:cNvSpPr txBox="1"/>
           <p:nvPr/>
         </p:nvSpPr>
@@ -7817,7 +7730,7 @@
       </p:sp>
       <p:sp>
         <p:nvSpPr>
-          <p:cNvPr id="9" name="Text 6"/>
+          <p:cNvPr id="10" name="Text 6"/>
           <p:cNvSpPr txBox="1"/>
           <p:nvPr/>
         </p:nvSpPr>
@@ -7859,7 +7772,7 @@
       </p:sp>
       <p:sp>
         <p:nvSpPr>
-          <p:cNvPr id="10" name="Text 7"/>
+          <p:cNvPr id="11" name="Text 7"/>
           <p:cNvSpPr txBox="1"/>
           <p:nvPr/>
         </p:nvSpPr>
@@ -7901,7 +7814,7 @@
       </p:sp>
       <p:sp>
         <p:nvSpPr>
-          <p:cNvPr id="11" name="Shape 8"/>
+          <p:cNvPr id="12" name="Shape 8"/>
           <p:cNvSpPr/>
           <p:nvPr/>
         </p:nvSpPr>
@@ -7922,9 +7835,33 @@
           </a:ln>
         </p:spPr>
       </p:sp>
-      <p:sp>
-        <p:nvSpPr>
-          <p:cNvPr id="12" name="Text 9"/>
+      <p:pic>
+        <p:nvPicPr>
+          <p:cNvPr id="13" name="Image 2" descr="float">    </p:cNvPr>
+          <p:cNvPicPr>
+            <a:picLocks noChangeAspect="1"/>
+          </p:cNvPicPr>
+          <p:nvPr/>
+        </p:nvPicPr>
+        <p:blipFill>
+          <a:blip r:embed="rId3"/>
+          <a:stretch>
+            <a:fillRect/>
+          </a:stretch>
+        </p:blipFill>
+        <p:spPr>
+          <a:xfrm>
+            <a:off x="640080" y="4745736"/>
+            <a:ext cx="1188720" cy="1188720"/>
+          </a:xfrm>
+          <a:prstGeom prst="rect">
+            <a:avLst/>
+          </a:prstGeom>
+        </p:spPr>
+      </p:pic>
+      <p:sp>
+        <p:nvSpPr>
+          <p:cNvPr id="14" name="Text 9"/>
           <p:cNvSpPr txBox="1"/>
           <p:nvPr/>
         </p:nvSpPr>
@@ -7966,7 +7903,7 @@
       </p:sp>
       <p:sp>
         <p:nvSpPr>
-          <p:cNvPr id="13" name="Text 10"/>
+          <p:cNvPr id="15" name="Text 10"/>
           <p:cNvSpPr txBox="1"/>
           <p:nvPr/>
         </p:nvSpPr>
@@ -8008,7 +7945,7 @@
       </p:sp>
       <p:sp>
         <p:nvSpPr>
-          <p:cNvPr id="14" name="Text 11"/>
+          <p:cNvPr id="16" name="Text 11"/>
           <p:cNvSpPr txBox="1"/>
           <p:nvPr/>
         </p:nvSpPr>
